--- a/wasabi-maizuru.com/images/logo.pptx
+++ b/wasabi-maizuru.com/images/logo.pptx
@@ -104,6 +104,11 @@
       </a:defRPr>
     </a:lvl9pPr>
   </p:defaultTextStyle>
+  <p:extLst>
+    <p:ext uri="{EFAFB233-063F-42B5-8137-9DF3F51BA10A}">
+      <p15:sldGuideLst xmlns:p15="http://schemas.microsoft.com/office/powerpoint/2012/main"/>
+    </p:ext>
+  </p:extLst>
 </p:presentation>
 </file>
 
@@ -254,7 +259,7 @@
           <a:p>
             <a:fld id="{CF1DCA6F-A128-4171-A83E-225236CF620E}" type="datetimeFigureOut">
               <a:rPr kumimoji="1" lang="ja-JP" altLang="en-US" smtClean="0"/>
-              <a:t>2026/8/18</a:t>
+              <a:t>2026/8/22</a:t>
             </a:fld>
             <a:endParaRPr kumimoji="1" lang="ja-JP" altLang="en-US"/>
           </a:p>
@@ -484,7 +489,7 @@
           <a:p>
             <a:fld id="{CF1DCA6F-A128-4171-A83E-225236CF620E}" type="datetimeFigureOut">
               <a:rPr kumimoji="1" lang="ja-JP" altLang="en-US" smtClean="0"/>
-              <a:t>2026/8/18</a:t>
+              <a:t>2026/8/22</a:t>
             </a:fld>
             <a:endParaRPr kumimoji="1" lang="ja-JP" altLang="en-US"/>
           </a:p>
@@ -724,7 +729,7 @@
           <a:p>
             <a:fld id="{CF1DCA6F-A128-4171-A83E-225236CF620E}" type="datetimeFigureOut">
               <a:rPr kumimoji="1" lang="ja-JP" altLang="en-US" smtClean="0"/>
-              <a:t>2026/8/18</a:t>
+              <a:t>2026/8/22</a:t>
             </a:fld>
             <a:endParaRPr kumimoji="1" lang="ja-JP" altLang="en-US"/>
           </a:p>
@@ -954,7 +959,7 @@
           <a:p>
             <a:fld id="{CF1DCA6F-A128-4171-A83E-225236CF620E}" type="datetimeFigureOut">
               <a:rPr kumimoji="1" lang="ja-JP" altLang="en-US" smtClean="0"/>
-              <a:t>2026/8/18</a:t>
+              <a:t>2026/8/22</a:t>
             </a:fld>
             <a:endParaRPr kumimoji="1" lang="ja-JP" altLang="en-US"/>
           </a:p>
@@ -1229,7 +1234,7 @@
           <a:p>
             <a:fld id="{CF1DCA6F-A128-4171-A83E-225236CF620E}" type="datetimeFigureOut">
               <a:rPr kumimoji="1" lang="ja-JP" altLang="en-US" smtClean="0"/>
-              <a:t>2026/8/18</a:t>
+              <a:t>2026/8/22</a:t>
             </a:fld>
             <a:endParaRPr kumimoji="1" lang="ja-JP" altLang="en-US"/>
           </a:p>
@@ -1558,7 +1563,7 @@
           <a:p>
             <a:fld id="{CF1DCA6F-A128-4171-A83E-225236CF620E}" type="datetimeFigureOut">
               <a:rPr kumimoji="1" lang="ja-JP" altLang="en-US" smtClean="0"/>
-              <a:t>2026/8/18</a:t>
+              <a:t>2026/8/22</a:t>
             </a:fld>
             <a:endParaRPr kumimoji="1" lang="ja-JP" altLang="en-US"/>
           </a:p>
@@ -2034,7 +2039,7 @@
           <a:p>
             <a:fld id="{CF1DCA6F-A128-4171-A83E-225236CF620E}" type="datetimeFigureOut">
               <a:rPr kumimoji="1" lang="ja-JP" altLang="en-US" smtClean="0"/>
-              <a:t>2026/8/18</a:t>
+              <a:t>2026/8/22</a:t>
             </a:fld>
             <a:endParaRPr kumimoji="1" lang="ja-JP" altLang="en-US"/>
           </a:p>
@@ -2175,7 +2180,7 @@
           <a:p>
             <a:fld id="{CF1DCA6F-A128-4171-A83E-225236CF620E}" type="datetimeFigureOut">
               <a:rPr kumimoji="1" lang="ja-JP" altLang="en-US" smtClean="0"/>
-              <a:t>2026/8/18</a:t>
+              <a:t>2026/8/22</a:t>
             </a:fld>
             <a:endParaRPr kumimoji="1" lang="ja-JP" altLang="en-US"/>
           </a:p>
@@ -2288,7 +2293,7 @@
           <a:p>
             <a:fld id="{CF1DCA6F-A128-4171-A83E-225236CF620E}" type="datetimeFigureOut">
               <a:rPr kumimoji="1" lang="ja-JP" altLang="en-US" smtClean="0"/>
-              <a:t>2026/8/18</a:t>
+              <a:t>2026/8/22</a:t>
             </a:fld>
             <a:endParaRPr kumimoji="1" lang="ja-JP" altLang="en-US"/>
           </a:p>
@@ -2631,7 +2636,7 @@
           <a:p>
             <a:fld id="{CF1DCA6F-A128-4171-A83E-225236CF620E}" type="datetimeFigureOut">
               <a:rPr kumimoji="1" lang="ja-JP" altLang="en-US" smtClean="0"/>
-              <a:t>2026/8/18</a:t>
+              <a:t>2026/8/22</a:t>
             </a:fld>
             <a:endParaRPr kumimoji="1" lang="ja-JP" altLang="en-US"/>
           </a:p>
@@ -2919,7 +2924,7 @@
           <a:p>
             <a:fld id="{CF1DCA6F-A128-4171-A83E-225236CF620E}" type="datetimeFigureOut">
               <a:rPr kumimoji="1" lang="ja-JP" altLang="en-US" smtClean="0"/>
-              <a:t>2026/8/18</a:t>
+              <a:t>2026/8/22</a:t>
             </a:fld>
             <a:endParaRPr kumimoji="1" lang="ja-JP" altLang="en-US"/>
           </a:p>
@@ -3192,7 +3197,7 @@
           <a:p>
             <a:fld id="{CF1DCA6F-A128-4171-A83E-225236CF620E}" type="datetimeFigureOut">
               <a:rPr kumimoji="1" lang="ja-JP" altLang="en-US" smtClean="0"/>
-              <a:t>2026/8/18</a:t>
+              <a:t>2026/8/22</a:t>
             </a:fld>
             <a:endParaRPr kumimoji="1" lang="ja-JP" altLang="en-US"/>
           </a:p>
@@ -3595,6 +3600,14 @@
 <file path=ppt/slides/slide1.xml><?xml version="1.0" encoding="utf-8"?>
 <p:sld xmlns:a="http://schemas.openxmlformats.org/drawingml/2006/main" xmlns:r="http://schemas.openxmlformats.org/officeDocument/2006/relationships" xmlns:p="http://schemas.openxmlformats.org/presentationml/2006/main">
   <p:cSld>
+    <p:bg>
+      <p:bgPr>
+        <a:solidFill>
+          <a:schemeClr val="tx1"/>
+        </a:solidFill>
+        <a:effectLst/>
+      </p:bgPr>
+    </p:bg>
     <p:spTree>
       <p:nvGrpSpPr>
         <p:cNvPr id="1" name=""/>
